--- a/UNIUBE-PDI/Slides/04 - Histograma e Equalizacao.pptx
+++ b/UNIUBE-PDI/Slides/04 - Histograma e Equalizacao.pptx
@@ -1886,7 +1886,7 @@
           <a:p>
             <a:fld id="{6ED03497-8374-466E-85FA-95E1138D8F6E}" type="datetimeFigureOut">
               <a:rPr lang="pt-BR" smtClean="0"/>
-              <a:t>03/09/2026</a:t>
+              <a:t>14/09/2026</a:t>
             </a:fld>
             <a:endParaRPr lang="pt-BR"/>
           </a:p>
@@ -4865,7 +4865,7 @@
           <a:p>
             <a:fld id="{A87E3B6E-8316-4A1C-BADA-DB7F3456EEF1}" type="datetimeFigureOut">
               <a:rPr lang="pt-BR" smtClean="0"/>
-              <a:t>03/09/2026</a:t>
+              <a:t>14/09/2026</a:t>
             </a:fld>
             <a:endParaRPr lang="pt-BR"/>
           </a:p>
@@ -5063,7 +5063,7 @@
           <a:p>
             <a:fld id="{A87E3B6E-8316-4A1C-BADA-DB7F3456EEF1}" type="datetimeFigureOut">
               <a:rPr lang="pt-BR" smtClean="0"/>
-              <a:t>03/09/2026</a:t>
+              <a:t>14/09/2026</a:t>
             </a:fld>
             <a:endParaRPr lang="pt-BR"/>
           </a:p>
@@ -5271,7 +5271,7 @@
           <a:p>
             <a:fld id="{A87E3B6E-8316-4A1C-BADA-DB7F3456EEF1}" type="datetimeFigureOut">
               <a:rPr lang="pt-BR" smtClean="0"/>
-              <a:t>03/09/2026</a:t>
+              <a:t>14/09/2026</a:t>
             </a:fld>
             <a:endParaRPr lang="pt-BR"/>
           </a:p>
@@ -5507,7 +5507,7 @@
           <a:p>
             <a:fld id="{A87E3B6E-8316-4A1C-BADA-DB7F3456EEF1}" type="datetimeFigureOut">
               <a:rPr lang="pt-BR" smtClean="0"/>
-              <a:t>03/09/2026</a:t>
+              <a:t>14/09/2026</a:t>
             </a:fld>
             <a:endParaRPr lang="pt-BR"/>
           </a:p>
@@ -5677,7 +5677,7 @@
           <a:p>
             <a:fld id="{A87E3B6E-8316-4A1C-BADA-DB7F3456EEF1}" type="datetimeFigureOut">
               <a:rPr lang="pt-BR" smtClean="0"/>
-              <a:t>03/09/2026</a:t>
+              <a:t>14/09/2026</a:t>
             </a:fld>
             <a:endParaRPr lang="pt-BR"/>
           </a:p>
@@ -5945,7 +5945,7 @@
           <a:p>
             <a:fld id="{A87E3B6E-8316-4A1C-BADA-DB7F3456EEF1}" type="datetimeFigureOut">
               <a:rPr lang="pt-BR" smtClean="0"/>
-              <a:t>03/09/2026</a:t>
+              <a:t>14/09/2026</a:t>
             </a:fld>
             <a:endParaRPr lang="pt-BR"/>
           </a:p>
@@ -6177,7 +6177,7 @@
           <a:p>
             <a:fld id="{A87E3B6E-8316-4A1C-BADA-DB7F3456EEF1}" type="datetimeFigureOut">
               <a:rPr lang="pt-BR" smtClean="0"/>
-              <a:t>03/09/2026</a:t>
+              <a:t>14/09/2026</a:t>
             </a:fld>
             <a:endParaRPr lang="pt-BR"/>
           </a:p>
@@ -6532,7 +6532,7 @@
           <a:p>
             <a:fld id="{A87E3B6E-8316-4A1C-BADA-DB7F3456EEF1}" type="datetimeFigureOut">
               <a:rPr lang="pt-BR" smtClean="0"/>
-              <a:t>03/09/2026</a:t>
+              <a:t>14/09/2026</a:t>
             </a:fld>
             <a:endParaRPr lang="pt-BR"/>
           </a:p>
@@ -6673,7 +6673,7 @@
           <a:p>
             <a:fld id="{A87E3B6E-8316-4A1C-BADA-DB7F3456EEF1}" type="datetimeFigureOut">
               <a:rPr lang="pt-BR" smtClean="0"/>
-              <a:t>03/09/2026</a:t>
+              <a:t>14/09/2026</a:t>
             </a:fld>
             <a:endParaRPr lang="pt-BR"/>
           </a:p>
@@ -6768,7 +6768,7 @@
           <a:p>
             <a:fld id="{A87E3B6E-8316-4A1C-BADA-DB7F3456EEF1}" type="datetimeFigureOut">
               <a:rPr lang="pt-BR" smtClean="0"/>
-              <a:t>03/09/2026</a:t>
+              <a:t>14/09/2026</a:t>
             </a:fld>
             <a:endParaRPr lang="pt-BR"/>
           </a:p>
@@ -7132,7 +7132,7 @@
           <a:p>
             <a:fld id="{A87E3B6E-8316-4A1C-BADA-DB7F3456EEF1}" type="datetimeFigureOut">
               <a:rPr lang="pt-BR" smtClean="0"/>
-              <a:t>03/09/2026</a:t>
+              <a:t>14/09/2026</a:t>
             </a:fld>
             <a:endParaRPr lang="pt-BR"/>
           </a:p>
@@ -7333,7 +7333,7 @@
           <a:p>
             <a:fld id="{A87E3B6E-8316-4A1C-BADA-DB7F3456EEF1}" type="datetimeFigureOut">
               <a:rPr lang="pt-BR" smtClean="0"/>
-              <a:t>03/09/2026</a:t>
+              <a:t>14/09/2026</a:t>
             </a:fld>
             <a:endParaRPr lang="pt-BR"/>
           </a:p>
@@ -7693,7 +7693,7 @@
           <a:p>
             <a:fld id="{A87E3B6E-8316-4A1C-BADA-DB7F3456EEF1}" type="datetimeFigureOut">
               <a:rPr lang="pt-BR" smtClean="0"/>
-              <a:t>03/09/2026</a:t>
+              <a:t>14/09/2026</a:t>
             </a:fld>
             <a:endParaRPr lang="pt-BR"/>
           </a:p>
@@ -7878,7 +7878,7 @@
           <a:p>
             <a:fld id="{A87E3B6E-8316-4A1C-BADA-DB7F3456EEF1}" type="datetimeFigureOut">
               <a:rPr lang="pt-BR" smtClean="0"/>
-              <a:t>03/09/2026</a:t>
+              <a:t>14/09/2026</a:t>
             </a:fld>
             <a:endParaRPr lang="pt-BR"/>
           </a:p>
@@ -8058,7 +8058,7 @@
           <a:p>
             <a:fld id="{A87E3B6E-8316-4A1C-BADA-DB7F3456EEF1}" type="datetimeFigureOut">
               <a:rPr lang="pt-BR" smtClean="0"/>
-              <a:t>03/09/2026</a:t>
+              <a:t>14/09/2026</a:t>
             </a:fld>
             <a:endParaRPr lang="pt-BR"/>
           </a:p>
@@ -8321,7 +8321,7 @@
           <a:p>
             <a:fld id="{A87E3B6E-8316-4A1C-BADA-DB7F3456EEF1}" type="datetimeFigureOut">
               <a:rPr lang="pt-BR" smtClean="0"/>
-              <a:t>03/09/2026</a:t>
+              <a:t>14/09/2026</a:t>
             </a:fld>
             <a:endParaRPr lang="pt-BR"/>
           </a:p>
@@ -8586,7 +8586,7 @@
           <a:p>
             <a:fld id="{A87E3B6E-8316-4A1C-BADA-DB7F3456EEF1}" type="datetimeFigureOut">
               <a:rPr lang="pt-BR" smtClean="0"/>
-              <a:t>03/09/2026</a:t>
+              <a:t>14/09/2026</a:t>
             </a:fld>
             <a:endParaRPr lang="pt-BR"/>
           </a:p>
@@ -8998,7 +8998,7 @@
           <a:p>
             <a:fld id="{A87E3B6E-8316-4A1C-BADA-DB7F3456EEF1}" type="datetimeFigureOut">
               <a:rPr lang="pt-BR" smtClean="0"/>
-              <a:t>03/09/2026</a:t>
+              <a:t>14/09/2026</a:t>
             </a:fld>
             <a:endParaRPr lang="pt-BR"/>
           </a:p>
@@ -9139,7 +9139,7 @@
           <a:p>
             <a:fld id="{A87E3B6E-8316-4A1C-BADA-DB7F3456EEF1}" type="datetimeFigureOut">
               <a:rPr lang="pt-BR" smtClean="0"/>
-              <a:t>03/09/2026</a:t>
+              <a:t>14/09/2026</a:t>
             </a:fld>
             <a:endParaRPr lang="pt-BR"/>
           </a:p>
@@ -9252,7 +9252,7 @@
           <a:p>
             <a:fld id="{A87E3B6E-8316-4A1C-BADA-DB7F3456EEF1}" type="datetimeFigureOut">
               <a:rPr lang="pt-BR" smtClean="0"/>
-              <a:t>03/09/2026</a:t>
+              <a:t>14/09/2026</a:t>
             </a:fld>
             <a:endParaRPr lang="pt-BR"/>
           </a:p>
@@ -9563,7 +9563,7 @@
           <a:p>
             <a:fld id="{A87E3B6E-8316-4A1C-BADA-DB7F3456EEF1}" type="datetimeFigureOut">
               <a:rPr lang="pt-BR" smtClean="0"/>
-              <a:t>03/09/2026</a:t>
+              <a:t>14/09/2026</a:t>
             </a:fld>
             <a:endParaRPr lang="pt-BR"/>
           </a:p>
@@ -9851,7 +9851,7 @@
           <a:p>
             <a:fld id="{A87E3B6E-8316-4A1C-BADA-DB7F3456EEF1}" type="datetimeFigureOut">
               <a:rPr lang="pt-BR" smtClean="0"/>
-              <a:t>03/09/2026</a:t>
+              <a:t>14/09/2026</a:t>
             </a:fld>
             <a:endParaRPr lang="pt-BR"/>
           </a:p>
@@ -10092,7 +10092,7 @@
           <a:p>
             <a:fld id="{A87E3B6E-8316-4A1C-BADA-DB7F3456EEF1}" type="datetimeFigureOut">
               <a:rPr lang="pt-BR" smtClean="0"/>
-              <a:t>03/09/2026</a:t>
+              <a:t>14/09/2026</a:t>
             </a:fld>
             <a:endParaRPr lang="pt-BR"/>
           </a:p>
@@ -10656,7 +10656,7 @@
           <a:p>
             <a:fld id="{A87E3B6E-8316-4A1C-BADA-DB7F3456EEF1}" type="datetimeFigureOut">
               <a:rPr lang="pt-BR" smtClean="0"/>
-              <a:t>03/09/2026</a:t>
+              <a:t>14/09/2026</a:t>
             </a:fld>
             <a:endParaRPr lang="pt-BR"/>
           </a:p>
@@ -11475,8 +11475,8 @@
           </a:p>
         </p:txBody>
       </p:sp>
-      <mc:AlternateContent xmlns:mc="http://schemas.openxmlformats.org/markup-compatibility/2006">
-        <mc:Choice xmlns:a14="http://schemas.microsoft.com/office/drawing/2010/main" Requires="a14">
+      <mc:AlternateContent xmlns:mc="http://schemas.openxmlformats.org/markup-compatibility/2006" xmlns:a14="http://schemas.microsoft.com/office/drawing/2010/main">
+        <mc:Choice Requires="a14">
           <p:sp>
             <p:nvSpPr>
               <p:cNvPr id="9" name="Espaço Reservado para Conteúdo 5">
@@ -11780,7 +11780,7 @@
             </p:txBody>
           </p:sp>
         </mc:Choice>
-        <mc:Fallback>
+        <mc:Fallback xmlns="">
           <p:sp>
             <p:nvSpPr>
               <p:cNvPr id="9" name="Espaço Reservado para Conteúdo 5">
@@ -16483,7 +16483,7 @@
           <p:nvPr>
             <p:extLst>
               <p:ext uri="{D42A27DB-BD31-4B8C-83A1-F6EECF244321}">
-                <p14:modId xmlns:p14="http://schemas.microsoft.com/office/powerpoint/2010/main" val="4097586886"/>
+                <p14:modId xmlns:p14="http://schemas.microsoft.com/office/powerpoint/2010/main" val="2606058513"/>
               </p:ext>
             </p:extLst>
           </p:nvPr>
@@ -16914,7 +16914,7 @@
                       <a:pPr algn="ctr"/>
                       <a:r>
                         <a:rPr lang="pt-BR" dirty="0"/>
-                        <a:t>0</a:t>
+                        <a:t>3</a:t>
                       </a:r>
                     </a:p>
                   </a:txBody>
